--- a/docs/AI-Parking-Assistant.pptx
+++ b/docs/AI-Parking-Assistant.pptx
@@ -4061,13 +4061,17 @@
             </a:pPr>
             <a:r>
               <a:rPr lang="en-US" sz="1600" dirty="0"/>
-              <a:t>Project: </a:t>
+              <a:t>Project</a:t>
             </a:r>
             <a:r>
-              <a:rPr lang="en-US" sz="1600" dirty="0">
+              <a:rPr lang="en-US" sz="1600"/>
+              <a:t>: </a:t>
+            </a:r>
+            <a:r>
+              <a:rPr lang="en-US" sz="1600">
                 <a:hlinkClick r:id="rId2"/>
               </a:rPr>
-              <a:t>https://github.com/ptsaritsyn/parking-space-ai/tree/dev</a:t>
+              <a:t>https://github.com/ptsaritsyn/parking-space-ai/tree/stage_4</a:t>
             </a:r>
             <a:endParaRPr lang="en-US" sz="1600" dirty="0"/>
           </a:p>
